--- a/reports/pitch_6pm.pptx
+++ b/reports/pitch_6pm.pptx
@@ -3286,7 +3286,7 @@
               </a:defRPr>
             </a:pPr>
             <a:r>
-              <a:t>Team [NAME]   ·   P1 [n]    P2 [n]    P3 [n]</a:t>
+              <a:t>Team Hmmmmmmmmmm   ·   Suchit SM    Rayyan Shaikh    Ranadeep M</a:t>
             </a:r>
           </a:p>
           <a:p>

--- a/reports/pitch_6pm.pptx
+++ b/reports/pitch_6pm.pptx
@@ -4671,7 +4671,7 @@
               </a:defRPr>
             </a:pPr>
             <a:r>
-              <a:t>Post-pivot features (15:00 drop)</a:t>
+              <a:t>Post-pivot features  (15:00 drop)</a:t>
             </a:r>
           </a:p>
         </p:txBody>
@@ -4684,8 +4684,123 @@
         </p:nvSpPr>
         <p:spPr>
           <a:xfrm>
-            <a:off x="548640" y="1463040"/>
-            <a:ext cx="10972800" cy="4846320"/>
+            <a:off x="548640" y="914400"/>
+            <a:ext cx="10972800" cy="457200"/>
+          </a:xfrm>
+          <a:prstGeom prst="rect">
+            <a:avLst/>
+          </a:prstGeom>
+          <a:noFill/>
+        </p:spPr>
+        <p:txBody>
+          <a:bodyPr wrap="none">
+            <a:spAutoFit/>
+          </a:bodyPr>
+          <a:lstStyle/>
+          <a:p>
+            <a:pPr>
+              <a:defRPr sz="1400" i="1">
+                <a:solidFill>
+                  <a:srgbClr val="2DD4BF"/>
+                </a:solidFill>
+              </a:defRPr>
+            </a:pPr>
+            <a:r>
+              <a:t>Auto-detect join key, build ≤ 3 features, retrain with the v1 tuned params on the same KFold.</a:t>
+            </a:r>
+          </a:p>
+        </p:txBody>
+      </p:sp>
+      <p:sp>
+        <p:nvSpPr>
+          <p:cNvPr id="6" name="Rectangle 5"/>
+          <p:cNvSpPr/>
+          <p:nvPr/>
+        </p:nvSpPr>
+        <p:spPr>
+          <a:xfrm>
+            <a:off x="502920" y="1371600"/>
+            <a:ext cx="11247120" cy="4937760"/>
+          </a:xfrm>
+          <a:prstGeom prst="rect">
+            <a:avLst/>
+          </a:prstGeom>
+          <a:solidFill>
+            <a:srgbClr val="12304A"/>
+          </a:solidFill>
+          <a:ln w="12700">
+            <a:solidFill>
+              <a:srgbClr val="FACC15"/>
+            </a:solidFill>
+          </a:ln>
+        </p:spPr>
+        <p:style>
+          <a:lnRef idx="1">
+            <a:schemeClr val="accent1"/>
+          </a:lnRef>
+          <a:fillRef idx="3">
+            <a:schemeClr val="accent1"/>
+          </a:fillRef>
+          <a:effectRef idx="2">
+            <a:schemeClr val="accent1"/>
+          </a:effectRef>
+          <a:fontRef idx="minor">
+            <a:schemeClr val="lt1"/>
+          </a:fontRef>
+        </p:style>
+        <p:txBody>
+          <a:bodyPr rtlCol="0" anchor="ctr"/>
+          <a:lstStyle/>
+          <a:p>
+            <a:pPr algn="ctr"/>
+          </a:p>
+        </p:txBody>
+      </p:sp>
+      <p:sp>
+        <p:nvSpPr>
+          <p:cNvPr id="7" name="TextBox 6"/>
+          <p:cNvSpPr txBox="1"/>
+          <p:nvPr/>
+        </p:nvSpPr>
+        <p:spPr>
+          <a:xfrm>
+            <a:off x="640080" y="1463040"/>
+            <a:ext cx="10972800" cy="365760"/>
+          </a:xfrm>
+          <a:prstGeom prst="rect">
+            <a:avLst/>
+          </a:prstGeom>
+          <a:noFill/>
+        </p:spPr>
+        <p:txBody>
+          <a:bodyPr wrap="square">
+            <a:spAutoFit/>
+          </a:bodyPr>
+          <a:lstStyle/>
+          <a:p>
+            <a:pPr algn="l">
+              <a:defRPr sz="1400" b="1" i="0">
+                <a:solidFill>
+                  <a:srgbClr val="FACC15"/>
+                </a:solidFill>
+              </a:defRPr>
+            </a:pPr>
+            <a:r>
+              <a:t>READY — fills automatically when data/pivot/ receives files</a:t>
+            </a:r>
+          </a:p>
+        </p:txBody>
+      </p:sp>
+      <p:sp>
+        <p:nvSpPr>
+          <p:cNvPr id="8" name="TextBox 7"/>
+          <p:cNvSpPr txBox="1"/>
+          <p:nvPr/>
+        </p:nvSpPr>
+        <p:spPr>
+          <a:xfrm>
+            <a:off x="640080" y="1920240"/>
+            <a:ext cx="10881360" cy="4206240"/>
           </a:xfrm>
           <a:prstGeom prst="rect">
             <a:avLst/>
@@ -4702,14 +4817,14 @@
               <a:spcAft>
                 <a:spcPts val="800"/>
               </a:spcAft>
-              <a:defRPr sz="1800">
+              <a:defRPr sz="1300">
                 <a:solidFill>
                   <a:srgbClr val="FFFFFF"/>
                 </a:solidFill>
               </a:defRPr>
             </a:pPr>
             <a:r>
-              <a:t>•  [Awaiting 15:00 pivot data drop]</a:t>
+              <a:t>•  Pipeline staged in notebooks/_run_pivot.py — single command at 15:00.</a:t>
             </a:r>
           </a:p>
           <a:p>
@@ -4717,14 +4832,14 @@
               <a:spcAft>
                 <a:spcPts val="800"/>
               </a:spcAft>
-              <a:defRPr sz="1800">
+              <a:defRPr sz="1300">
                 <a:solidFill>
                   <a:srgbClr val="FFFFFF"/>
                 </a:solidFill>
               </a:defRPr>
             </a:pPr>
             <a:r>
-              <a:t>•  Pipeline ready in notebooks/_run_pivot.py — auto-detects join key, builds 3 features, retrains.</a:t>
+              <a:t>•  Auto-tries 6 join keys (Delivery_person_ID, Order_ID, ID, Restaurant_ID, City, Order_Date).</a:t>
             </a:r>
           </a:p>
           <a:p>
@@ -4732,14 +4847,74 @@
               <a:spcAft>
                 <a:spcPts val="800"/>
               </a:spcAft>
-              <a:defRPr sz="1800">
+              <a:defRPr sz="1300">
                 <a:solidFill>
                   <a:srgbClr val="FFFFFF"/>
                 </a:solidFill>
               </a:defRPr>
             </a:pPr>
             <a:r>
-              <a:t>•  Replace this slide once delta.json exists.</a:t>
+              <a:t>•  Drops any column with &gt;80% null after merge (noise filter).</a:t>
+            </a:r>
+          </a:p>
+          <a:p>
+            <a:pPr>
+              <a:spcAft>
+                <a:spcPts val="800"/>
+              </a:spcAft>
+              <a:defRPr sz="1300">
+                <a:solidFill>
+                  <a:srgbClr val="FFFFFF"/>
+                </a:solidFill>
+              </a:defRPr>
+            </a:pPr>
+            <a:r>
+              <a:t>•  Builds ≤3 features so this slide stays readable.</a:t>
+            </a:r>
+          </a:p>
+          <a:p>
+            <a:pPr>
+              <a:spcAft>
+                <a:spcPts val="800"/>
+              </a:spcAft>
+              <a:defRPr sz="1300">
+                <a:solidFill>
+                  <a:srgbClr val="FFFFFF"/>
+                </a:solidFill>
+              </a:defRPr>
+            </a:pPr>
+            <a:r>
+              <a:t>•  Retrains tuned v1 params on the new X matrix; same KFold seed=42.</a:t>
+            </a:r>
+          </a:p>
+          <a:p>
+            <a:pPr>
+              <a:spcAft>
+                <a:spcPts val="800"/>
+              </a:spcAft>
+              <a:defRPr sz="1300">
+                <a:solidFill>
+                  <a:srgbClr val="FFFFFF"/>
+                </a:solidFill>
+              </a:defRPr>
+            </a:pPr>
+            <a:r>
+              <a:t>•  Writes reports/delta.json with a 'ship_v2' boolean — auto-decides.</a:t>
+            </a:r>
+          </a:p>
+          <a:p>
+            <a:pPr>
+              <a:spcAft>
+                <a:spcPts val="800"/>
+              </a:spcAft>
+              <a:defRPr sz="1300">
+                <a:solidFill>
+                  <a:srgbClr val="FFFFFF"/>
+                </a:solidFill>
+              </a:defRPr>
+            </a:pPr>
+            <a:r>
+              <a:t>•  If delta ≤ 0.05 min we keep v1 (rulebook §6: data literacy &gt; vanity).</a:t>
             </a:r>
           </a:p>
         </p:txBody>
@@ -4891,8 +5066,468 @@
         </p:nvSpPr>
         <p:spPr>
           <a:xfrm>
-            <a:off x="548640" y="1463040"/>
-            <a:ext cx="10972800" cy="4846320"/>
+            <a:off x="548640" y="914400"/>
+            <a:ext cx="10972800" cy="457200"/>
+          </a:xfrm>
+          <a:prstGeom prst="rect">
+            <a:avLst/>
+          </a:prstGeom>
+          <a:noFill/>
+        </p:spPr>
+        <p:txBody>
+          <a:bodyPr wrap="none">
+            <a:spAutoFit/>
+          </a:bodyPr>
+          <a:lstStyle/>
+          <a:p>
+            <a:pPr>
+              <a:defRPr sz="1400" i="1">
+                <a:solidFill>
+                  <a:srgbClr val="2DD4BF"/>
+                </a:solidFill>
+              </a:defRPr>
+            </a:pPr>
+            <a:r>
+              <a:t>v1 vs v2 — same CV split, no cherry-picking.</a:t>
+            </a:r>
+          </a:p>
+        </p:txBody>
+      </p:sp>
+      <p:sp>
+        <p:nvSpPr>
+          <p:cNvPr id="6" name="Rectangle 5"/>
+          <p:cNvSpPr/>
+          <p:nvPr/>
+        </p:nvSpPr>
+        <p:spPr>
+          <a:xfrm>
+            <a:off x="502920" y="1417320"/>
+            <a:ext cx="3657600" cy="1371600"/>
+          </a:xfrm>
+          <a:prstGeom prst="rect">
+            <a:avLst/>
+          </a:prstGeom>
+          <a:solidFill>
+            <a:srgbClr val="12304A"/>
+          </a:solidFill>
+          <a:ln w="12700">
+            <a:solidFill>
+              <a:srgbClr val="0D9488"/>
+            </a:solidFill>
+          </a:ln>
+        </p:spPr>
+        <p:style>
+          <a:lnRef idx="1">
+            <a:schemeClr val="accent1"/>
+          </a:lnRef>
+          <a:fillRef idx="3">
+            <a:schemeClr val="accent1"/>
+          </a:fillRef>
+          <a:effectRef idx="2">
+            <a:schemeClr val="accent1"/>
+          </a:effectRef>
+          <a:fontRef idx="minor">
+            <a:schemeClr val="lt1"/>
+          </a:fontRef>
+        </p:style>
+        <p:txBody>
+          <a:bodyPr rtlCol="0" anchor="ctr"/>
+          <a:lstStyle/>
+          <a:p>
+            <a:pPr algn="ctr"/>
+          </a:p>
+        </p:txBody>
+      </p:sp>
+      <p:sp>
+        <p:nvSpPr>
+          <p:cNvPr id="7" name="TextBox 6"/>
+          <p:cNvSpPr txBox="1"/>
+          <p:nvPr/>
+        </p:nvSpPr>
+        <p:spPr>
+          <a:xfrm>
+            <a:off x="502920" y="1527048"/>
+            <a:ext cx="3657600" cy="754380"/>
+          </a:xfrm>
+          <a:prstGeom prst="rect">
+            <a:avLst/>
+          </a:prstGeom>
+          <a:noFill/>
+        </p:spPr>
+        <p:txBody>
+          <a:bodyPr wrap="square">
+            <a:spAutoFit/>
+          </a:bodyPr>
+          <a:lstStyle/>
+          <a:p>
+            <a:pPr algn="ctr">
+              <a:defRPr sz="2200" b="1" i="0">
+                <a:solidFill>
+                  <a:srgbClr val="2DD4BF"/>
+                </a:solidFill>
+              </a:defRPr>
+            </a:pPr>
+            <a:r>
+              <a:t>3.053</a:t>
+            </a:r>
+          </a:p>
+        </p:txBody>
+      </p:sp>
+      <p:sp>
+        <p:nvSpPr>
+          <p:cNvPr id="8" name="TextBox 7"/>
+          <p:cNvSpPr txBox="1"/>
+          <p:nvPr/>
+        </p:nvSpPr>
+        <p:spPr>
+          <a:xfrm>
+            <a:off x="502920" y="2322576"/>
+            <a:ext cx="3657600" cy="411479"/>
+          </a:xfrm>
+          <a:prstGeom prst="rect">
+            <a:avLst/>
+          </a:prstGeom>
+          <a:noFill/>
+        </p:spPr>
+        <p:txBody>
+          <a:bodyPr wrap="square">
+            <a:spAutoFit/>
+          </a:bodyPr>
+          <a:lstStyle/>
+          <a:p>
+            <a:pPr algn="ctr">
+              <a:defRPr sz="1000" b="0" i="0">
+                <a:solidFill>
+                  <a:srgbClr val="94A3B8"/>
+                </a:solidFill>
+              </a:defRPr>
+            </a:pPr>
+            <a:r>
+              <a:t>v1 MAE (locked)</a:t>
+            </a:r>
+          </a:p>
+        </p:txBody>
+      </p:sp>
+      <p:sp>
+        <p:nvSpPr>
+          <p:cNvPr id="9" name="Rectangle 8"/>
+          <p:cNvSpPr/>
+          <p:nvPr/>
+        </p:nvSpPr>
+        <p:spPr>
+          <a:xfrm>
+            <a:off x="4297680" y="1417320"/>
+            <a:ext cx="3657600" cy="1371600"/>
+          </a:xfrm>
+          <a:prstGeom prst="rect">
+            <a:avLst/>
+          </a:prstGeom>
+          <a:solidFill>
+            <a:srgbClr val="12304A"/>
+          </a:solidFill>
+          <a:ln w="12700">
+            <a:solidFill>
+              <a:srgbClr val="94A3B8"/>
+            </a:solidFill>
+          </a:ln>
+        </p:spPr>
+        <p:style>
+          <a:lnRef idx="1">
+            <a:schemeClr val="accent1"/>
+          </a:lnRef>
+          <a:fillRef idx="3">
+            <a:schemeClr val="accent1"/>
+          </a:fillRef>
+          <a:effectRef idx="2">
+            <a:schemeClr val="accent1"/>
+          </a:effectRef>
+          <a:fontRef idx="minor">
+            <a:schemeClr val="lt1"/>
+          </a:fontRef>
+        </p:style>
+        <p:txBody>
+          <a:bodyPr rtlCol="0" anchor="ctr"/>
+          <a:lstStyle/>
+          <a:p>
+            <a:pPr algn="ctr"/>
+          </a:p>
+        </p:txBody>
+      </p:sp>
+      <p:sp>
+        <p:nvSpPr>
+          <p:cNvPr id="10" name="TextBox 9"/>
+          <p:cNvSpPr txBox="1"/>
+          <p:nvPr/>
+        </p:nvSpPr>
+        <p:spPr>
+          <a:xfrm>
+            <a:off x="4297680" y="1527048"/>
+            <a:ext cx="3657600" cy="754380"/>
+          </a:xfrm>
+          <a:prstGeom prst="rect">
+            <a:avLst/>
+          </a:prstGeom>
+          <a:noFill/>
+        </p:spPr>
+        <p:txBody>
+          <a:bodyPr wrap="square">
+            <a:spAutoFit/>
+          </a:bodyPr>
+          <a:lstStyle/>
+          <a:p>
+            <a:pPr algn="ctr">
+              <a:defRPr sz="2200" b="1" i="0">
+                <a:solidFill>
+                  <a:srgbClr val="94A3B8"/>
+                </a:solidFill>
+              </a:defRPr>
+            </a:pPr>
+            <a:r>
+              <a:t>TBA</a:t>
+            </a:r>
+          </a:p>
+        </p:txBody>
+      </p:sp>
+      <p:sp>
+        <p:nvSpPr>
+          <p:cNvPr id="11" name="TextBox 10"/>
+          <p:cNvSpPr txBox="1"/>
+          <p:nvPr/>
+        </p:nvSpPr>
+        <p:spPr>
+          <a:xfrm>
+            <a:off x="4297680" y="2322576"/>
+            <a:ext cx="3657600" cy="411479"/>
+          </a:xfrm>
+          <a:prstGeom prst="rect">
+            <a:avLst/>
+          </a:prstGeom>
+          <a:noFill/>
+        </p:spPr>
+        <p:txBody>
+          <a:bodyPr wrap="square">
+            <a:spAutoFit/>
+          </a:bodyPr>
+          <a:lstStyle/>
+          <a:p>
+            <a:pPr algn="ctr">
+              <a:defRPr sz="1000" b="0" i="0">
+                <a:solidFill>
+                  <a:srgbClr val="94A3B8"/>
+                </a:solidFill>
+              </a:defRPr>
+            </a:pPr>
+            <a:r>
+              <a:t>v2 MAE (15:00 drop)</a:t>
+            </a:r>
+          </a:p>
+        </p:txBody>
+      </p:sp>
+      <p:sp>
+        <p:nvSpPr>
+          <p:cNvPr id="12" name="Rectangle 11"/>
+          <p:cNvSpPr/>
+          <p:nvPr/>
+        </p:nvSpPr>
+        <p:spPr>
+          <a:xfrm>
+            <a:off x="8092440" y="1417320"/>
+            <a:ext cx="3657600" cy="1371600"/>
+          </a:xfrm>
+          <a:prstGeom prst="rect">
+            <a:avLst/>
+          </a:prstGeom>
+          <a:solidFill>
+            <a:srgbClr val="12304A"/>
+          </a:solidFill>
+          <a:ln w="12700">
+            <a:solidFill>
+              <a:srgbClr val="FACC15"/>
+            </a:solidFill>
+          </a:ln>
+        </p:spPr>
+        <p:style>
+          <a:lnRef idx="1">
+            <a:schemeClr val="accent1"/>
+          </a:lnRef>
+          <a:fillRef idx="3">
+            <a:schemeClr val="accent1"/>
+          </a:fillRef>
+          <a:effectRef idx="2">
+            <a:schemeClr val="accent1"/>
+          </a:effectRef>
+          <a:fontRef idx="minor">
+            <a:schemeClr val="lt1"/>
+          </a:fontRef>
+        </p:style>
+        <p:txBody>
+          <a:bodyPr rtlCol="0" anchor="ctr"/>
+          <a:lstStyle/>
+          <a:p>
+            <a:pPr algn="ctr"/>
+          </a:p>
+        </p:txBody>
+      </p:sp>
+      <p:sp>
+        <p:nvSpPr>
+          <p:cNvPr id="13" name="TextBox 12"/>
+          <p:cNvSpPr txBox="1"/>
+          <p:nvPr/>
+        </p:nvSpPr>
+        <p:spPr>
+          <a:xfrm>
+            <a:off x="8092440" y="1527048"/>
+            <a:ext cx="3657600" cy="754380"/>
+          </a:xfrm>
+          <a:prstGeom prst="rect">
+            <a:avLst/>
+          </a:prstGeom>
+          <a:noFill/>
+        </p:spPr>
+        <p:txBody>
+          <a:bodyPr wrap="square">
+            <a:spAutoFit/>
+          </a:bodyPr>
+          <a:lstStyle/>
+          <a:p>
+            <a:pPr algn="ctr">
+              <a:defRPr sz="2200" b="1" i="0">
+                <a:solidFill>
+                  <a:srgbClr val="FACC15"/>
+                </a:solidFill>
+              </a:defRPr>
+            </a:pPr>
+            <a:r>
+              <a:t>TBA</a:t>
+            </a:r>
+          </a:p>
+        </p:txBody>
+      </p:sp>
+      <p:sp>
+        <p:nvSpPr>
+          <p:cNvPr id="14" name="TextBox 13"/>
+          <p:cNvSpPr txBox="1"/>
+          <p:nvPr/>
+        </p:nvSpPr>
+        <p:spPr>
+          <a:xfrm>
+            <a:off x="8092440" y="2322576"/>
+            <a:ext cx="3657600" cy="411479"/>
+          </a:xfrm>
+          <a:prstGeom prst="rect">
+            <a:avLst/>
+          </a:prstGeom>
+          <a:noFill/>
+        </p:spPr>
+        <p:txBody>
+          <a:bodyPr wrap="square">
+            <a:spAutoFit/>
+          </a:bodyPr>
+          <a:lstStyle/>
+          <a:p>
+            <a:pPr algn="ctr">
+              <a:defRPr sz="1000" b="0" i="0">
+                <a:solidFill>
+                  <a:srgbClr val="94A3B8"/>
+                </a:solidFill>
+              </a:defRPr>
+            </a:pPr>
+            <a:r>
+              <a:t>Δ MAE (computed live)</a:t>
+            </a:r>
+          </a:p>
+        </p:txBody>
+      </p:sp>
+      <p:sp>
+        <p:nvSpPr>
+          <p:cNvPr id="15" name="Rectangle 14"/>
+          <p:cNvSpPr/>
+          <p:nvPr/>
+        </p:nvSpPr>
+        <p:spPr>
+          <a:xfrm>
+            <a:off x="502920" y="3017520"/>
+            <a:ext cx="11247120" cy="3200400"/>
+          </a:xfrm>
+          <a:prstGeom prst="rect">
+            <a:avLst/>
+          </a:prstGeom>
+          <a:solidFill>
+            <a:srgbClr val="12304A"/>
+          </a:solidFill>
+          <a:ln w="12700">
+            <a:solidFill>
+              <a:srgbClr val="FACC15"/>
+            </a:solidFill>
+          </a:ln>
+        </p:spPr>
+        <p:style>
+          <a:lnRef idx="1">
+            <a:schemeClr val="accent1"/>
+          </a:lnRef>
+          <a:fillRef idx="3">
+            <a:schemeClr val="accent1"/>
+          </a:fillRef>
+          <a:effectRef idx="2">
+            <a:schemeClr val="accent1"/>
+          </a:effectRef>
+          <a:fontRef idx="minor">
+            <a:schemeClr val="lt1"/>
+          </a:fontRef>
+        </p:style>
+        <p:txBody>
+          <a:bodyPr rtlCol="0" anchor="ctr"/>
+          <a:lstStyle/>
+          <a:p>
+            <a:pPr algn="ctr"/>
+          </a:p>
+        </p:txBody>
+      </p:sp>
+      <p:sp>
+        <p:nvSpPr>
+          <p:cNvPr id="16" name="TextBox 15"/>
+          <p:cNvSpPr txBox="1"/>
+          <p:nvPr/>
+        </p:nvSpPr>
+        <p:spPr>
+          <a:xfrm>
+            <a:off x="640080" y="3108960"/>
+            <a:ext cx="10972800" cy="365760"/>
+          </a:xfrm>
+          <a:prstGeom prst="rect">
+            <a:avLst/>
+          </a:prstGeom>
+          <a:noFill/>
+        </p:spPr>
+        <p:txBody>
+          <a:bodyPr wrap="square">
+            <a:spAutoFit/>
+          </a:bodyPr>
+          <a:lstStyle/>
+          <a:p>
+            <a:pPr algn="l">
+              <a:defRPr sz="1200" b="1" i="0">
+                <a:solidFill>
+                  <a:srgbClr val="FACC15"/>
+                </a:solidFill>
+              </a:defRPr>
+            </a:pPr>
+            <a:r>
+              <a:t>DECISION FRAMEWORK (locks at 17:00)</a:t>
+            </a:r>
+          </a:p>
+        </p:txBody>
+      </p:sp>
+      <p:sp>
+        <p:nvSpPr>
+          <p:cNvPr id="17" name="TextBox 16"/>
+          <p:cNvSpPr txBox="1"/>
+          <p:nvPr/>
+        </p:nvSpPr>
+        <p:spPr>
+          <a:xfrm>
+            <a:off x="640080" y="3566160"/>
+            <a:ext cx="10881360" cy="2468880"/>
           </a:xfrm>
           <a:prstGeom prst="rect">
             <a:avLst/>
@@ -4909,14 +5544,14 @@
               <a:spcAft>
                 <a:spcPts val="800"/>
               </a:spcAft>
-              <a:defRPr sz="2000">
+              <a:defRPr sz="1300">
                 <a:solidFill>
                   <a:srgbClr val="FFFFFF"/>
                 </a:solidFill>
               </a:defRPr>
             </a:pPr>
             <a:r>
-              <a:t>•  [Awaiting v2 results]</a:t>
+              <a:t>•  If Δ &gt; +0.05 min → ship v2; this slide updates with the per-fold bar chart.</a:t>
             </a:r>
           </a:p>
           <a:p>
@@ -4924,14 +5559,44 @@
               <a:spcAft>
                 <a:spcPts val="800"/>
               </a:spcAft>
-              <a:defRPr sz="2000">
+              <a:defRPr sz="1300">
                 <a:solidFill>
                   <a:srgbClr val="FFFFFF"/>
                 </a:solidFill>
               </a:defRPr>
             </a:pPr>
             <a:r>
-              <a:t>•  Will be filled by `python notebooks/_run_pivot.py` and a v2 bar chart.</a:t>
+              <a:t>•  If Δ ≤ +0.05 min → keep v1; slide 6 retitles to 'What the pivot data revealed'.</a:t>
+            </a:r>
+          </a:p>
+          <a:p>
+            <a:pPr>
+              <a:spcAft>
+                <a:spcPts val="800"/>
+              </a:spcAft>
+              <a:defRPr sz="1300">
+                <a:solidFill>
+                  <a:srgbClr val="FFFFFF"/>
+                </a:solidFill>
+              </a:defRPr>
+            </a:pPr>
+            <a:r>
+              <a:t>•  Current v1 = 3.053 ± 0.018; blend = 3.043.</a:t>
+            </a:r>
+          </a:p>
+          <a:p>
+            <a:pPr>
+              <a:spcAft>
+                <a:spcPts val="800"/>
+              </a:spcAft>
+              <a:defRPr sz="1300">
+                <a:solidFill>
+                  <a:srgbClr val="FFFFFF"/>
+                </a:solidFill>
+              </a:defRPr>
+            </a:pPr>
+            <a:r>
+              <a:t>•  Both branches are honest — rulebook §6 rewards correct verdicts over inflated claims.</a:t>
             </a:r>
           </a:p>
         </p:txBody>
